--- a/DBTUNING/ch24_ADDM자동진단/ch24_ADDM_자동진단해석.pptx
+++ b/DBTUNING/ch24_ADDM자동진단/ch24_ADDM_자동진단해석.pptx
@@ -888,7 +888,7 @@
           <a:lstStyle/>
           <a:p>
             <a:r>
-              <a:t>가장 큰 Finding이다. SQL_ID 9vmszgd1ft9x0는 8장 AWR에서 Elapsed 1위였던 바로 그 문장으로, CLAIM_DETAILS 대량 스캔(WL_02)이 만든 집계다. ADDM은 이 SQL에 SQL Tuning Advisor를 돌리라고 권고한다(이득 31.37%). 권고는 "이렇게 고치라"가 아니라 "여기를 더 파라"는 다음 단계 지시다. 여기서 이 과정과 SQL 튜닝 과정의 경계가 드러난다 — 한 문장을 어떻게 고칠지는 SQLT 과정의 영역이다.</a:t>
+              <a:t>가장 큰 Finding이다. SQL_ID 9vmszgd1ft9x0는 ch22 AWR에서 Elapsed 1위였던 바로 그 문장으로, CLAIM_DETAILS 대량 스캔(WL_02)이 만든 집계다. ADDM은 이 SQL에 SQL Tuning Advisor를 돌리라고 권고한다(이득 31.37%). 권고는 "이렇게 고치라"가 아니라 "여기를 더 파라"는 다음 단계 지시다. 여기서 이 과정과 SQL 튜닝 과정의 경계가 드러난다 — 한 문장을 어떻게 고칠지는 SQLT 과정의 영역이다.</a:t>
             </a:r>
           </a:p>
         </p:txBody>
@@ -1028,7 +1028,7 @@
           <a:lstStyle/>
           <a:p>
             <a:r>
-              <a:t>이 장에서 개념적으로 가장 중요한 Finding이다. 8장 AWR에서 본 하드 파싱 초당 319회, Library Hit 59% 같은 숫자에 ADDM이 이름을 붙였다 — 리터럴 때문에 SQL이 공유되지 못해 추가 하드 파싱이 난다. WL_01 부하가 자동 진단에 잡힌 자리다. 권고는 바인드 변수, 어렵다면 CURSOR_SHARING=FORCE다. DBA_ADVISOR_FINDINGS에서 Hard Parse는 SYMPTOM, Literal Usage는 PROBLEM으로 나란히 잡혀 조치 대상이 어느 쪽인지 분명하다.</a:t>
+              <a:t>이 장에서 개념적으로 가장 중요한 Finding이다. ch22 AWR에서 본 하드 파싱 초당 319회, Library Hit 59% 같은 숫자에 ADDM이 이름을 붙였다 — 리터럴 때문에 SQL이 공유되지 못해 추가 하드 파싱이 난다. WL_01 부하가 자동 진단에 잡힌 자리다. 권고는 바인드 변수, 어렵다면 CURSOR_SHARING=FORCE다. DBA_ADVISOR_FINDINGS에서 Hard Parse는 SYMPTOM, Literal Usage는 PROBLEM으로 나란히 잡혀 조치 대상이 어느 쪽인지 분명하다.</a:t>
             </a:r>
           </a:p>
         </p:txBody>
@@ -1098,7 +1098,7 @@
           <a:lstStyle/>
           <a:p>
             <a:r>
-              <a:t>세 번째 Finding은 잦은 커밋·롤백으로 log file sync가 DB Time을 소비한다는 것이다(21.15초). WL_05 부하이며 8장 AWR Top Events의 log file sync 21.1초와 같은 대기다. 권고는 커밋 빈도를 줄이거나 로그 I/O를 개선하라는 것이다. 영향도 3.69%로 작으므로 Top SQL을 처리하기 전에 여기 매달릴 이유가 없다. DBA_ADVISOR_FINDINGS에 PROBLEM·SYMPTOM 두 줄로 나타나는 겹침 사례이기도 하다.</a:t>
+              <a:t>세 번째 Finding은 잦은 커밋·롤백으로 log file sync가 DB Time을 소비한다는 것이다(21.15초). WL_05 부하이며 ch22 AWR Top Events의 log file sync 21.1초와 같은 대기다. 권고는 커밋 빈도를 줄이거나 로그 I/O를 개선하라는 것이다. 영향도 3.69%로 작으므로 Top SQL을 처리하기 전에 여기 매달릴 이유가 없다. DBA_ADVISOR_FINDINGS에 PROBLEM·SYMPTOM 두 줄로 나타나는 겹침 사례이기도 하다.</a:t>
             </a:r>
           </a:p>
         </p:txBody>
@@ -1308,7 +1308,7 @@
           <a:lstStyle/>
           <a:p>
             <a:r>
-              <a:t>8장에서 봤듯 AWR 보고서는 실측 3,598줄에 이른다. 사람이 매번 정확히 우선순위를 매기기 어렵다. ADDM은 이를 늘 같은 기준으로 빠르게 한다. 단순히 높은 값을 보여 주는 것이 아니라 증상에서 근본 원인으로 인과를 세우고, 문제가 아닌 영역까지 알려 줘 엉뚱한 곳을 파는 것을 막는다. 다만 AWR 데이터에 기반하므로 스냅샷이 놓친 짧은 스파이크는 못 본다 — 그때가 ASH의 자리다.</a:t>
+              <a:t>ch22에서 봤듯 AWR 보고서는 실측 3,598줄에 이른다. 사람이 매번 정확히 우선순위를 매기기 어렵다. ADDM은 이를 늘 같은 기준으로 빠르게 한다. 단순히 높은 값을 보여 주는 것이 아니라 증상에서 근본 원인으로 인과를 세우고, 문제가 아닌 영역까지 알려 줘 엉뚱한 곳을 파는 것을 막는다. 다만 AWR 데이터에 기반하므로 스냅샷이 놓친 짧은 스파이크는 못 본다 — 그때가 ASH의 자리다.</a:t>
             </a:r>
           </a:p>
         </p:txBody>
@@ -1448,7 +1448,7 @@
           <a:lstStyle/>
           <a:p>
             <a:r>
-              <a:t>ADDM과 관련 뷰는 Diagnostics Pack이 필요하다. 팩이 없으면 ADDM이 자동으로 통합해 주던 것을 V$ 뷰 델타로 손수 재구성한다. Top SQL은 V$SQL 정렬, 하드 파싱은 V$SYSSTAT의 parse count(hard) 델타와 V$LIBRARYCACHE, 커밋 부하는 user commits 델타와 log file sync로 본다. 6장의 Statspack이 구간 보고서의 대안이다. 실습 4·5에서 이 대안 경로를 직접 다룬다는 점을 안내한다.</a:t>
+              <a:t>ADDM과 관련 뷰는 Diagnostics Pack이 필요하다. 팩이 없으면 ADDM이 자동으로 통합해 주던 것을 V$ 뷰 델타로 손수 재구성한다. Top SQL은 V$SQL 정렬, 하드 파싱은 V$SYSSTAT의 parse count(hard) 델타와 V$LIBRARYCACHE, 커밋 부하는 user commits 델타와 log file sync로 본다. ch20의 Statspack이 구간 보고서의 대안이다. 실습 4·5에서 이 대안 경로를 직접 다룬다는 점을 안내한다.</a:t>
             </a:r>
           </a:p>
         </p:txBody>
@@ -5503,7 +5503,7 @@
                 <a:latin typeface="맑은 고딕"/>
                 <a:ea typeface="맑은 고딕"/>
               </a:rPr>
-              <a:t>제9장</a:t>
+              <a:t>제ch24</a:t>
             </a:r>
           </a:p>
         </p:txBody>
@@ -7720,7 +7720,7 @@
                 <a:latin typeface="맑은 고딕"/>
                 <a:ea typeface="맑은 고딕"/>
               </a:rPr>
-              <a:t>•  8·9·10장 같은 부하</a:t>
+              <a:t>•  ch22·ch24·ch25 같은 부하</a:t>
             </a:r>
           </a:p>
         </p:txBody>
@@ -7912,7 +7912,7 @@
                 <a:latin typeface="맑은 고딕"/>
                 <a:ea typeface="맑은 고딕"/>
               </a:rPr>
-              <a:t>•  실측 상위 Finding을 8장 AWR·10장 ASH의 같은 구간과 연결해 해석한다.</a:t>
+              <a:t>•  실측 상위 Finding을 ch22 AWR·ch25 ASH의 같은 구간과 연결해 해석한다.</a:t>
             </a:r>
           </a:p>
           <a:p>
@@ -8451,7 +8451,7 @@
                 <a:latin typeface="맑은 고딕"/>
                 <a:ea typeface="맑은 고딕"/>
               </a:rPr>
-              <a:t>•  SQL_ID 9vmszgd1ft9x0 = 8장 AWR Elapsed 1위(190.6초·33.2%)</a:t>
+              <a:t>•  SQL_ID 9vmszgd1ft9x0 = ch22 AWR Elapsed 1위(190.6초·33.2%)</a:t>
             </a:r>
           </a:p>
           <a:p>
@@ -8997,7 +8997,7 @@
                 <a:latin typeface="맑은 고딕"/>
                 <a:ea typeface="맑은 고딕"/>
               </a:rPr>
-              <a:t>•  8장 AWR의 숫자(하드 파싱 초당 319, Library Hit 59%)에 이름을 붙임</a:t>
+              <a:t>•  ch22 AWR의 숫자(하드 파싱 초당 319, Library Hit 59%)에 이름을 붙임</a:t>
             </a:r>
           </a:p>
           <a:p>
@@ -9212,7 +9212,7 @@
                 <a:latin typeface="맑은 고딕"/>
                 <a:ea typeface="맑은 고딕"/>
               </a:rPr>
-              <a:t>•  8장 AWR Top Events의 log file sync 21.1초·Commit 3.7%와 동일</a:t>
+              <a:t>•  ch22 AWR Top Events의 log file sync 21.1초·Commit 3.7%와 동일</a:t>
             </a:r>
           </a:p>
           <a:p>
@@ -9368,7 +9368,7 @@
                 <a:latin typeface="맑은 고딕"/>
                 <a:ea typeface="맑은 고딕"/>
               </a:rPr>
-              <a:t>8·9·10장의 일관성</a:t>
+              <a:t>ch22·ch24·ch25의 일관성</a:t>
             </a:r>
           </a:p>
         </p:txBody>
@@ -9403,7 +9403,7 @@
                 <a:latin typeface="맑은 고딕"/>
                 <a:ea typeface="맑은 고딕"/>
               </a:rPr>
-              <a:t>•  AWR(8장): DB CPU 95.7% · log file sync · 하드 파싱 경합</a:t>
+              <a:t>•  AWR(ch22): DB CPU 95.7% · log file sync · 하드 파싱 경합</a:t>
             </a:r>
           </a:p>
           <a:p>
@@ -9415,7 +9415,7 @@
                 <a:latin typeface="맑은 고딕"/>
                 <a:ea typeface="맑은 고딕"/>
               </a:rPr>
-              <a:t>•  ADDM(9장): Top SQL 60.78% · Literal 5.82% · Commits 3.69%</a:t>
+              <a:t>•  ADDM(ch24): Top SQL 60.78% · Literal 5.82% · Commits 3.69%</a:t>
             </a:r>
           </a:p>
           <a:p>
@@ -9427,7 +9427,7 @@
                 <a:latin typeface="맑은 고딕"/>
                 <a:ea typeface="맑은 고딕"/>
               </a:rPr>
-              <a:t>•  ASH(10장): ON CPU 90.7% · 상위 SQL 9vmszgd1ft9x0</a:t>
+              <a:t>•  ASH(ch25): ON CPU 90.7% · 상위 SQL 9vmszgd1ft9x0</a:t>
             </a:r>
           </a:p>
           <a:p>
@@ -12068,7 +12068,7 @@
                 <a:latin typeface="맑은 고딕"/>
                 <a:ea typeface="맑은 고딕"/>
               </a:rPr>
-              <a:t>•  실측: Top SQL 60.78% · Literal 5.82% · Commits 3.69% = 8·10장 같은 부하</a:t>
+              <a:t>•  실측: Top SQL 60.78% · Literal 5.82% · Commits 3.69% = ch22·ch25 같은 부하</a:t>
             </a:r>
           </a:p>
           <a:p>
@@ -12925,7 +12925,7 @@
                 <a:latin typeface="맑은 고딕"/>
                 <a:ea typeface="맑은 고딕"/>
               </a:rPr>
-              <a:t>•  한계 — AWR 기반이라 짧은 스파이크는 못 봄(→ 10장 ASH)</a:t>
+              <a:t>•  한계 — AWR 기반이라 짧은 스파이크는 못 봄(→ ch25 ASH)</a:t>
             </a:r>
           </a:p>
         </p:txBody>

--- a/DBTUNING/ch24_ADDM자동진단/ch24_ADDM_자동진단해석.pptx
+++ b/DBTUNING/ch24_ADDM자동진단/ch24_ADDM_자동진단해석.pptx
@@ -5503,7 +5503,7 @@
                 <a:latin typeface="맑은 고딕"/>
                 <a:ea typeface="맑은 고딕"/>
               </a:rPr>
-              <a:t>제ch24</a:t>
+              <a:t>ch24</a:t>
             </a:r>
           </a:p>
         </p:txBody>

--- a/DBTUNING/ch24_ADDM자동진단/ch24_ADDM_자동진단해석.pptx
+++ b/DBTUNING/ch24_ADDM자동진단/ch24_ADDM_자동진단해석.pptx
@@ -6412,7 +6412,7 @@
                 <a:latin typeface="맑은 고딕"/>
                 <a:ea typeface="맑은 고딕"/>
               </a:rPr>
-              <a:t>9.4</a:t>
+              <a:t>24.4</a:t>
             </a:r>
           </a:p>
         </p:txBody>
@@ -7582,7 +7582,7 @@
                 <a:latin typeface="맑은 고딕"/>
                 <a:ea typeface="맑은 고딕"/>
               </a:rPr>
-              <a:t>9.5</a:t>
+              <a:t>24.5</a:t>
             </a:r>
           </a:p>
         </p:txBody>
@@ -9536,7 +9536,7 @@
                 <a:latin typeface="맑은 고딕"/>
                 <a:ea typeface="맑은 고딕"/>
               </a:rPr>
-              <a:t>9.6</a:t>
+              <a:t>24.6</a:t>
             </a:r>
           </a:p>
         </p:txBody>
@@ -10589,7 +10589,7 @@
                 <a:latin typeface="맑은 고딕"/>
                 <a:ea typeface="맑은 고딕"/>
               </a:rPr>
-              <a:t>•  9.2  ADDM이란 무엇인가 — AWR 위에서 도는 자동 진단자</a:t>
+              <a:t>•  24.2  ADDM이란 무엇인가 — AWR 위에서 도는 자동 진단자</a:t>
             </a:r>
           </a:p>
           <a:p>
@@ -10601,7 +10601,7 @@
                 <a:latin typeface="맑은 고딕"/>
                 <a:ea typeface="맑은 고딕"/>
               </a:rPr>
-              <a:t>•  9.3  Finding·Recommendation·Rationale 구조</a:t>
+              <a:t>•  24.3  Finding·Recommendation·Rationale 구조</a:t>
             </a:r>
           </a:p>
           <a:p>
@@ -10613,7 +10613,7 @@
                 <a:latin typeface="맑은 고딕"/>
                 <a:ea typeface="맑은 고딕"/>
               </a:rPr>
-              <a:t>•  9.4  ADDM 태스크 실행과 보고서 생성</a:t>
+              <a:t>•  24.4  ADDM 태스크 실행과 보고서 생성</a:t>
             </a:r>
           </a:p>
           <a:p>
@@ -10625,7 +10625,7 @@
                 <a:latin typeface="맑은 고딕"/>
                 <a:ea typeface="맑은 고딕"/>
               </a:rPr>
-              <a:t>•  9.5  실측 ADDM 보고서 판독 — 스냅샷 295~296</a:t>
+              <a:t>•  24.5  실측 ADDM 보고서 판독 — 스냅샷 295~296</a:t>
             </a:r>
           </a:p>
           <a:p>
@@ -10637,7 +10637,7 @@
                 <a:latin typeface="맑은 고딕"/>
                 <a:ea typeface="맑은 고딕"/>
               </a:rPr>
-              <a:t>•  9.6  ADDM 뷰 직접 조회와 라이선스 없는 대안</a:t>
+              <a:t>•  24.6  ADDM 뷰 직접 조회와 라이선스 없는 대안</a:t>
             </a:r>
           </a:p>
           <a:p>
@@ -10649,7 +10649,7 @@
                 <a:latin typeface="맑은 고딕"/>
                 <a:ea typeface="맑은 고딕"/>
               </a:rPr>
-              <a:t>•  9.7  권고를 그대로 따르면 안 되는 이유</a:t>
+              <a:t>•  24.7  권고를 그대로 따르면 안 되는 이유</a:t>
             </a:r>
           </a:p>
           <a:p>
@@ -10758,7 +10758,7 @@
                 <a:latin typeface="맑은 고딕"/>
                 <a:ea typeface="맑은 고딕"/>
               </a:rPr>
-              <a:t>9.7</a:t>
+              <a:t>24.7</a:t>
             </a:r>
           </a:p>
         </p:txBody>
@@ -12381,7 +12381,7 @@
                 <a:latin typeface="맑은 고딕"/>
                 <a:ea typeface="맑은 고딕"/>
               </a:rPr>
-              <a:t>9.2</a:t>
+              <a:t>24.2</a:t>
             </a:r>
           </a:p>
         </p:txBody>
@@ -13534,7 +13534,7 @@
                 <a:latin typeface="맑은 고딕"/>
                 <a:ea typeface="맑은 고딕"/>
               </a:rPr>
-              <a:t>9.3</a:t>
+              <a:t>24.3</a:t>
             </a:r>
           </a:p>
         </p:txBody>
